--- a/presentation/Employee_Burnout_Risk_Prediction.pptx
+++ b/presentation/Employee_Burnout_Risk_Prediction.pptx
@@ -170,7 +170,7 @@
 <p1510:revInfo xmlns:a="http://schemas.openxmlformats.org/drawingml/2006/main" xmlns:r="http://schemas.openxmlformats.org/officeDocument/2006/relationships" xmlns:p1510="http://schemas.microsoft.com/office/powerpoint/2015/10/main">
   <p1510:revLst>
     <p1510:client id="{48A48416-0341-B580-2318-0CCD4F982C78}" v="8" dt="2026-05-22T06:45:55.574"/>
-    <p1510:client id="{8491569D-10BA-7223-3B44-FF44C05DF9E7}" v="55" dt="2026-05-22T06:56:50.316"/>
+    <p1510:client id="{8491569D-10BA-7223-3B44-FF44C05DF9E7}" v="66" dt="2026-05-22T21:43:37.498"/>
   </p1510:revLst>
 </p1510:revInfo>
 </file>
@@ -257,7 +257,7 @@
           <a:p>
             <a:fld id="{632132BA-7F90-C045-AC3C-D088D737BC85}" type="datetimeFigureOut">
               <a:rPr lang="en-US" smtClean="0"/>
-              <a:t>5/21/2026</a:t>
+              <a:t>5/22/2026</a:t>
             </a:fld>
             <a:endParaRPr lang="en-US"/>
           </a:p>
@@ -423,7 +423,7 @@
           <a:p>
             <a:fld id="{D724605C-FF3E-654F-890C-85C3E6C4269C}" type="datetimeFigureOut">
               <a:rPr lang="en-US" smtClean="0"/>
-              <a:t>5/21/2026</a:t>
+              <a:t>5/22/2026</a:t>
             </a:fld>
             <a:endParaRPr lang="en-US"/>
           </a:p>
@@ -1042,7 +1042,7 @@
           <a:p>
             <a:fld id="{11E87A6F-16E5-2444-8E01-52483A43058D}" type="datetime1">
               <a:rPr lang="en-US" smtClean="0"/>
-              <a:t>5/21/2026</a:t>
+              <a:t>5/22/2026</a:t>
             </a:fld>
             <a:endParaRPr lang="en-US"/>
           </a:p>
@@ -1371,7 +1371,7 @@
           <a:p>
             <a:fld id="{30C8DD4D-0F64-554F-821E-A588CA7F0791}" type="datetime1">
               <a:rPr lang="en-US" smtClean="0"/>
-              <a:t>5/21/2026</a:t>
+              <a:t>5/22/2026</a:t>
             </a:fld>
             <a:endParaRPr lang="en-US"/>
           </a:p>
@@ -1544,7 +1544,7 @@
           <a:p>
             <a:fld id="{B933654A-3E1B-1642-984F-D85157AAB59A}" type="datetime1">
               <a:rPr lang="en-US" smtClean="0"/>
-              <a:t>5/21/2026</a:t>
+              <a:t>5/22/2026</a:t>
             </a:fld>
             <a:endParaRPr lang="en-US"/>
           </a:p>
@@ -1727,7 +1727,7 @@
           <a:p>
             <a:fld id="{B0A649C1-9FF8-D641-9274-7E16A33349D5}" type="datetime1">
               <a:rPr lang="en-US" smtClean="0"/>
-              <a:t>5/21/2026</a:t>
+              <a:t>5/22/2026</a:t>
             </a:fld>
             <a:endParaRPr lang="en-US"/>
           </a:p>
@@ -2527,7 +2527,7 @@
           <a:p>
             <a:fld id="{646ABE37-C354-7843-8D1B-82AD8732054D}" type="datetime1">
               <a:rPr lang="en-US" smtClean="0"/>
-              <a:t>5/21/2026</a:t>
+              <a:t>5/22/2026</a:t>
             </a:fld>
             <a:endParaRPr lang="en-US"/>
           </a:p>
@@ -2762,7 +2762,7 @@
           <a:p>
             <a:fld id="{BB2C8EF8-12EF-244B-8AD9-ADF3AF7DF6B1}" type="datetime1">
               <a:rPr lang="en-US" smtClean="0"/>
-              <a:t>5/21/2026</a:t>
+              <a:t>5/22/2026</a:t>
             </a:fld>
             <a:endParaRPr lang="en-US"/>
           </a:p>
@@ -3022,7 +3022,7 @@
           <a:p>
             <a:fld id="{3CADE1FB-A965-7646-B21B-EA92A716BFB6}" type="datetime1">
               <a:rPr lang="en-US" smtClean="0"/>
-              <a:t>5/21/2026</a:t>
+              <a:t>5/22/2026</a:t>
             </a:fld>
             <a:endParaRPr lang="en-US"/>
           </a:p>
@@ -3313,7 +3313,7 @@
           <a:p>
             <a:fld id="{890562DD-2E3D-1046-8925-14B387B4EBE4}" type="datetime1">
               <a:rPr lang="en-US" smtClean="0"/>
-              <a:t>5/21/2026</a:t>
+              <a:t>5/22/2026</a:t>
             </a:fld>
             <a:endParaRPr lang="en-US"/>
           </a:p>
@@ -3738,7 +3738,7 @@
           <a:p>
             <a:fld id="{996B5E3E-DB9A-D44E-A77E-F04CA3810003}" type="datetime1">
               <a:rPr lang="en-US" smtClean="0"/>
-              <a:t>5/21/2026</a:t>
+              <a:t>5/22/2026</a:t>
             </a:fld>
             <a:endParaRPr lang="en-US"/>
           </a:p>
@@ -3883,7 +3883,7 @@
           <a:p>
             <a:fld id="{3ED3CC3B-8D39-4F4D-BF99-FB2D3A1E3AF3}" type="datetime1">
               <a:rPr lang="en-US" smtClean="0"/>
-              <a:t>5/21/2026</a:t>
+              <a:t>5/22/2026</a:t>
             </a:fld>
             <a:endParaRPr lang="en-US"/>
           </a:p>
@@ -4029,7 +4029,7 @@
           <a:p>
             <a:fld id="{3E4A6A1B-DA9C-F04B-AB4D-14C78B78D751}" type="datetime1">
               <a:rPr lang="en-US" smtClean="0"/>
-              <a:t>5/21/2026</a:t>
+              <a:t>5/22/2026</a:t>
             </a:fld>
             <a:endParaRPr lang="en-US"/>
           </a:p>
@@ -4309,7 +4309,7 @@
           <a:p>
             <a:fld id="{2E7ACD2A-FE21-F941-9181-60477F37902D}" type="datetime1">
               <a:rPr lang="en-US" smtClean="0"/>
-              <a:t>5/21/2026</a:t>
+              <a:t>5/22/2026</a:t>
             </a:fld>
             <a:endParaRPr lang="en-US"/>
           </a:p>
@@ -4528,7 +4528,7 @@
           <a:p>
             <a:fld id="{3EAAA085-F8B6-C74F-A545-7650ED705A4F}" type="datetime1">
               <a:rPr lang="en-US" smtClean="0"/>
-              <a:t>5/21/2026</a:t>
+              <a:t>5/22/2026</a:t>
             </a:fld>
             <a:endParaRPr lang="en-US"/>
           </a:p>
@@ -5007,7 +5007,7 @@
             <a:pPr algn="l"/>
             <a:r>
               <a:rPr lang="pt-PT"/>
-              <a:t>Melissa Nízero Cuna  up…</a:t>
+              <a:t>Melissa Nízero Cuna  up202209735</a:t>
             </a:r>
           </a:p>
           <a:p>
@@ -5123,7 +5123,7 @@
               </a:rPr>
               <a:t>Garantir a qualidade e limpeza dos dados provenientes de diferentes fontes (ex: inquéritos vs. registos de horas)</a:t>
             </a:r>
-            <a:endParaRPr lang="en-PT" sz="1800" dirty="0">
+            <a:endParaRPr lang="en-PT" sz="1800">
               <a:solidFill>
                 <a:srgbClr val="000000"/>
               </a:solidFill>
@@ -5133,7 +5133,7 @@
           </a:p>
           <a:p>
             <a:pPr lvl="1"/>
-            <a:endParaRPr lang="en-US" sz="1800" dirty="0"/>
+            <a:endParaRPr lang="en-US" sz="1800"/>
           </a:p>
           <a:p>
             <a:r>
@@ -5154,7 +5154,7 @@
               <a:t>Resistência dos colaboradores por medo de "vigilância" ou de que os dados de stress sejam usados negativamente na avaliação de desempenho</a:t>
             </a:r>
             <a:br>
-              <a:rPr lang="en-US" sz="1800" dirty="0">
+              <a:rPr lang="en-US" sz="1800">
                 <a:ea typeface="+mn-lt"/>
                 <a:cs typeface="+mn-lt"/>
               </a:rPr>
@@ -5334,7 +5334,7 @@
             <a:pPr marL="0" indent="0">
               <a:buNone/>
             </a:pPr>
-            <a:endParaRPr lang="pt-PT" sz="1800" dirty="0">
+            <a:endParaRPr lang="pt-PT" sz="1800">
               <a:solidFill>
                 <a:srgbClr val="000000"/>
               </a:solidFill>
@@ -5372,7 +5372,7 @@
             <a:pPr marL="0" indent="0">
               <a:buNone/>
             </a:pPr>
-            <a:endParaRPr lang="pt-PT" sz="1800" dirty="0">
+            <a:endParaRPr lang="pt-PT" sz="1800">
               <a:solidFill>
                 <a:srgbClr val="000000"/>
               </a:solidFill>
@@ -5404,7 +5404,7 @@
             <a:endParaRPr lang="pt-PT" sz="1800"/>
           </a:p>
           <a:p>
-            <a:endParaRPr lang="en-PT" dirty="0">
+            <a:endParaRPr lang="en-PT">
               <a:ea typeface="Calibri"/>
               <a:cs typeface="Calibri"/>
             </a:endParaRPr>
@@ -5581,7 +5581,7 @@
             <a:pPr marL="0" indent="0">
               <a:buNone/>
             </a:pPr>
-            <a:endParaRPr lang="pt-PT" sz="1800" dirty="0">
+            <a:endParaRPr lang="pt-PT" sz="1800">
               <a:solidFill>
                 <a:srgbClr val="000000"/>
               </a:solidFill>
@@ -5622,7 +5622,7 @@
             <a:pPr marL="0" indent="0">
               <a:buNone/>
             </a:pPr>
-            <a:endParaRPr lang="pt-PT" sz="1800" dirty="0">
+            <a:endParaRPr lang="pt-PT" sz="1800">
               <a:solidFill>
                 <a:srgbClr val="000000"/>
               </a:solidFill>
@@ -5661,9 +5661,9 @@
               <a:buNone/>
             </a:pPr>
             <a:br>
-              <a:rPr lang="en-US" dirty="0"/>
+              <a:rPr lang="en-US"/>
             </a:br>
-            <a:endParaRPr lang="en-US" dirty="0"/>
+            <a:endParaRPr lang="en-US"/>
           </a:p>
         </p:txBody>
       </p:sp>
@@ -7862,7 +7862,7 @@
               </a:rPr>
               <a:t> Para validar as métricas de bem-estar.</a:t>
             </a:r>
-            <a:endParaRPr lang="pt-PT" sz="1800" dirty="0">
+            <a:endParaRPr lang="pt-PT" sz="1800">
               <a:ea typeface="Calibri"/>
               <a:cs typeface="Calibri"/>
             </a:endParaRPr>
@@ -7871,7 +7871,7 @@
             <a:pPr marL="0" indent="0">
               <a:buNone/>
             </a:pPr>
-            <a:endParaRPr lang="pt-PT" sz="1800" dirty="0">
+            <a:endParaRPr lang="pt-PT" sz="1800">
               <a:solidFill>
                 <a:srgbClr val="000000"/>
               </a:solidFill>
@@ -7903,7 +7903,7 @@
               </a:rPr>
               <a:t>Para implementar as intervenções sugeridas.</a:t>
             </a:r>
-            <a:endParaRPr lang="pt-PT" sz="1800" dirty="0">
+            <a:endParaRPr lang="pt-PT" sz="1800">
               <a:ea typeface="Calibri"/>
               <a:cs typeface="Calibri"/>
             </a:endParaRPr>
@@ -7912,7 +7912,7 @@
             <a:pPr marL="0" indent="0">
               <a:buNone/>
             </a:pPr>
-            <a:endParaRPr lang="pt-PT" sz="1800" dirty="0">
+            <a:endParaRPr lang="pt-PT" sz="1800">
               <a:solidFill>
                 <a:srgbClr val="000000"/>
               </a:solidFill>
@@ -7944,7 +7944,7 @@
               </a:rPr>
               <a:t> Para garantir a integração com sistemas de gestão de projetos e proteção de dados.</a:t>
             </a:r>
-            <a:endParaRPr lang="pt-PT" sz="1800" dirty="0">
+            <a:endParaRPr lang="pt-PT" sz="1800">
               <a:ea typeface="Calibri"/>
               <a:cs typeface="Calibri"/>
             </a:endParaRPr>
@@ -7953,7 +7953,7 @@
             <a:pPr marL="0" indent="0">
               <a:buNone/>
             </a:pPr>
-            <a:endParaRPr lang="pt-PT" sz="1800" dirty="0">
+            <a:endParaRPr lang="pt-PT" sz="1800">
               <a:solidFill>
                 <a:srgbClr val="000000"/>
               </a:solidFill>
@@ -7994,7 +7994,7 @@
             <a:pPr marL="0" indent="0">
               <a:buNone/>
             </a:pPr>
-            <a:endParaRPr lang="pt-PT" sz="1800" dirty="0">
+            <a:endParaRPr lang="pt-PT" sz="1800">
               <a:ea typeface="Calibri"/>
               <a:cs typeface="Calibri"/>
             </a:endParaRPr>
